--- a/outils/affiches/affiche-evenement-programme.pptx
+++ b/outils/affiches/affiche-evenement-programme.pptx
@@ -3343,9 +3343,33 @@
           </a:prstGeom>
         </p:spPr>
       </p:pic>
-      <p:sp>
-        <p:nvSpPr>
-          <p:cNvPr id="10" name="TextBox 9"/>
+      <p:pic>
+        <p:nvPicPr>
+          <p:cNvPr id="10" name="Picture 9" descr="logo-ca-assurances.png"/>
+          <p:cNvPicPr>
+            <a:picLocks noChangeAspect="1"/>
+          </p:cNvPicPr>
+          <p:nvPr/>
+        </p:nvPicPr>
+        <p:blipFill>
+          <a:blip r:embed="rId4"/>
+          <a:stretch>
+            <a:fillRect/>
+          </a:stretch>
+        </p:blipFill>
+        <p:spPr>
+          <a:xfrm>
+            <a:off x="1296000" y="8136000"/>
+            <a:ext cx="1655999" cy="1046797"/>
+          </a:xfrm>
+          <a:prstGeom prst="rect">
+            <a:avLst/>
+          </a:prstGeom>
+        </p:spPr>
+      </p:pic>
+      <p:sp>
+        <p:nvSpPr>
+          <p:cNvPr id="11" name="TextBox 10"/>
           <p:cNvSpPr txBox="1"/>
           <p:nvPr/>
         </p:nvSpPr>
